--- a/healthcare_presentation_notes.pptx
+++ b/healthcare_presentation_notes.pptx
@@ -4175,7 +4175,7 @@
               <a:t>SPEAKER 1
 WebMD is a health website where patients write reviews of their medications. Each review includes a star rating from 1 to 10, the condition being treated, the date, and a written comment. We collected 6,827 reviews across all 50 of our target drugs.
 The first challenge was technical. WebMD builds its review pages using JavaScript — a programming language that runs in the browser. When we sent a simple web request, the server returned an empty page because the reviews had not been loaded yet. To get around this, we used a tool called Selenium, which launches a real Chrome browser, waits for the JavaScript to finish running, and then reads the fully loaded page.
-The second challenge was that WebMD changed their web addresses mid-project. 37 of our 50 drugs were returning error pages. Each drug has a unique address ending called a slug. The correct format turned out to be the drug name followed by brand names followed by the word others. For example, lisinopril's correct address ending is lisinopril-prinivil-zestril-others. We had to find the correct address for each of the 37 broken drugs </a:t>
+The second challenge was that WebMD changed their web addresses mid-project. 37 of our 50 drugs were returning error pages. Each drug has a unique address ending called a slug. The correct format turned out to be the drug name followed by brand names followed by the word others. For example, lisinopril's correct address ending is lisinopril-prinivil-zestril-others. We had to find the correct address for  37 broken drugs </a:t>
             </a:r>
           </a:p>
         </p:txBody>
@@ -4533,7 +4533,7 @@
           <a:p>
             <a:r>
               <a:rPr lang="en-US" dirty="0"/>
-              <a:t>SPEAKER 1
+              <a:t>
 This table shows all six data sources in one place. Reading left to right — source name, number of records collected, the method we used to collect it, whether authentication was needed, the key measurement we extracted for our model, and the main challenge we faced.
 Three things worth pointing out.
 First, none of these databases required payment or account creation. They are all open government or public medical databases. This is a strength of the project — it is fully reproducible by anyone.
@@ -5603,7 +5603,7 @@
                   <a:srgbClr val="FFFFFF"/>
                 </a:solidFill>
               </a:rPr>
-              <a:t>SPEAKER 2 — NLP PIPELINE</a:t>
+              <a:t>NLP PIPELINE</a:t>
             </a:r>
             <a:endParaRPr lang="en-US" sz="800" dirty="0"/>
           </a:p>
@@ -6588,7 +6588,7 @@
                   <a:srgbClr val="FFFFFF"/>
                 </a:solidFill>
               </a:rPr>
-              <a:t>SPEAKER 2 — CLASSIFICATION</a:t>
+              <a:t>CLASSIFICATION</a:t>
             </a:r>
             <a:endParaRPr lang="en-US" sz="800" dirty="0"/>
           </a:p>
@@ -7226,7 +7226,7 @@
                   <a:srgbClr val="FFFFFF"/>
                 </a:solidFill>
               </a:rPr>
-              <a:t>SPEAKER 2 — UNSUPERVISED NLP</a:t>
+              <a:t>UNSUPERVISED NLP</a:t>
             </a:r>
             <a:endParaRPr lang="en-US" sz="800" dirty="0"/>
           </a:p>
@@ -9039,7 +9039,7 @@
                   <a:srgbClr val="FFFFFF"/>
                 </a:solidFill>
               </a:rPr>
-              <a:t>SPEAKER 2 — CLUSTERING</a:t>
+              <a:t>CLUSTERING</a:t>
             </a:r>
             <a:endParaRPr lang="en-US" sz="800" dirty="0"/>
           </a:p>
@@ -10287,7 +10287,7 @@
                   <a:srgbClr val="FFFFFF"/>
                 </a:solidFill>
               </a:rPr>
-              <a:t>SPEAKER 2 — WORD2VEC</a:t>
+              <a:t>WORD2VEC</a:t>
             </a:r>
             <a:endParaRPr lang="en-US" sz="800" dirty="0"/>
           </a:p>
@@ -11366,7 +11366,7 @@
                   <a:srgbClr val="FFFFFF"/>
                 </a:solidFill>
               </a:rPr>
-              <a:t>SPEAKER 2 — FEATURE ENGINEERING</a:t>
+              <a:t>FEATURE ENGINEERING</a:t>
             </a:r>
             <a:endParaRPr lang="en-US" sz="800" dirty="0"/>
           </a:p>
@@ -13074,7 +13074,7 @@
                   <a:srgbClr val="FFFFFF"/>
                 </a:solidFill>
               </a:rPr>
-              <a:t>SPEAKER 2 — MODEL RESULTS</a:t>
+              <a:t>MODEL RESULTS</a:t>
             </a:r>
             <a:endParaRPr lang="en-US" sz="800" dirty="0"/>
           </a:p>
@@ -13734,7 +13734,7 @@
                   <a:srgbClr val="FFFFFF"/>
                 </a:solidFill>
               </a:rPr>
-              <a:t>SPEAKER 2 — HYPOTHESIS TESTING</a:t>
+              <a:t>HYPOTHESIS TESTING</a:t>
             </a:r>
             <a:endParaRPr lang="en-US" sz="800" dirty="0"/>
           </a:p>
@@ -17454,7 +17454,7 @@
                   <a:srgbClr val="FFFFFF"/>
                 </a:solidFill>
               </a:rPr>
-              <a:t>SPEAKER 1 — PROJECT OVERVIEW</a:t>
+              <a:t> PROJECT OVERVIEW</a:t>
             </a:r>
             <a:endParaRPr lang="en-US" sz="800" dirty="0"/>
           </a:p>
@@ -18312,7 +18312,7 @@
                   <a:srgbClr val="FFFFFF"/>
                 </a:solidFill>
               </a:rPr>
-              <a:t>SPEAKER 3 — PHASE 2C</a:t>
+              <a:t>PHASE 2C</a:t>
             </a:r>
             <a:endParaRPr lang="en-US" sz="800" dirty="0"/>
           </a:p>
@@ -19726,7 +19726,7 @@
                   <a:srgbClr val="FFFFFF"/>
                 </a:solidFill>
               </a:rPr>
-              <a:t>SPEAKER 3 — RATING PREDICTION</a:t>
+              <a:t>RATING PREDICTION</a:t>
             </a:r>
             <a:endParaRPr lang="en-US" sz="800" dirty="0"/>
           </a:p>
@@ -21354,7 +21354,7 @@
                   <a:srgbClr val="FFFFFF"/>
                 </a:solidFill>
               </a:rPr>
-              <a:t>SPEAKER 3 — POWER ANALYSIS</a:t>
+              <a:t>POWER ANALYSIS</a:t>
             </a:r>
             <a:endParaRPr lang="en-US" sz="800" dirty="0"/>
           </a:p>
@@ -22250,7 +22250,7 @@
                   <a:srgbClr val="FFFFFF"/>
                 </a:solidFill>
               </a:rPr>
-              <a:t>SPEAKER 3 — KEY FINDINGS</a:t>
+              <a:t>KEY FINDINGS</a:t>
             </a:r>
             <a:endParaRPr lang="en-US" sz="800" dirty="0"/>
           </a:p>
@@ -23469,7 +23469,7 @@
                   <a:srgbClr val="FFFFFF"/>
                 </a:solidFill>
               </a:rPr>
-              <a:t>SPEAKER 3 — COMPARISON &amp; FUTURE WORK</a:t>
+              <a:t>COMPARISON &amp; FUTURE WORK</a:t>
             </a:r>
             <a:endParaRPr lang="en-US" sz="800" dirty="0"/>
           </a:p>
@@ -25898,7 +25898,7 @@
                   <a:srgbClr val="FFFFFF"/>
                 </a:solidFill>
               </a:rPr>
-              <a:t>SPEAKER 1 — DATA ARCHITECTURE</a:t>
+              <a:t>DATA ARCHITECTURE</a:t>
             </a:r>
             <a:endParaRPr lang="en-US" sz="800" dirty="0"/>
           </a:p>
@@ -29388,7 +29388,7 @@
                   <a:srgbClr val="FFFFFF"/>
                 </a:solidFill>
               </a:rPr>
-              <a:t>SPEAKER 1 — DATA SOURCE 2</a:t>
+              <a:t>DATA SOURCE 2</a:t>
             </a:r>
             <a:endParaRPr lang="en-US" sz="800" dirty="0"/>
           </a:p>
@@ -30465,7 +30465,7 @@
                   <a:srgbClr val="FFFFFF"/>
                 </a:solidFill>
               </a:rPr>
-              <a:t>SPEAKER 1 — DATA SOURCES 3 &amp; 4</a:t>
+              <a:t>DATA SOURCES 3 &amp; 4</a:t>
             </a:r>
             <a:endParaRPr lang="en-US" sz="800" dirty="0"/>
           </a:p>
@@ -31415,7 +31415,7 @@
                   <a:srgbClr val="FFFFFF"/>
                 </a:solidFill>
               </a:rPr>
-              <a:t>SPEAKER 1 — DATA SOURCES 5 &amp; 6</a:t>
+              <a:t>DATA SOURCES 5 &amp; 6</a:t>
             </a:r>
             <a:endParaRPr lang="en-US" sz="800" dirty="0"/>
           </a:p>
@@ -35840,7 +35840,7 @@
                   <a:srgbClr val="FFFFFF"/>
                 </a:solidFill>
               </a:rPr>
-              <a:t>SPEAKER 1 — EDA</a:t>
+              <a:t>EDA</a:t>
             </a:r>
             <a:endParaRPr lang="en-US" sz="800" dirty="0"/>
           </a:p>
